--- a/toniBIM-icons.pptx
+++ b/toniBIM-icons.pptx
@@ -259,7 +259,7 @@
           <a:p>
             <a:fld id="{11A84FED-4B30-4DF6-BB30-F99FEDC3385F}" type="datetimeFigureOut">
               <a:rPr lang="pt-BR" smtClean="0"/>
-              <a:t>17/05/2026</a:t>
+              <a:t>18/05/2026</a:t>
             </a:fld>
             <a:endParaRPr lang="pt-BR"/>
           </a:p>
@@ -457,7 +457,7 @@
           <a:p>
             <a:fld id="{11A84FED-4B30-4DF6-BB30-F99FEDC3385F}" type="datetimeFigureOut">
               <a:rPr lang="pt-BR" smtClean="0"/>
-              <a:t>17/05/2026</a:t>
+              <a:t>18/05/2026</a:t>
             </a:fld>
             <a:endParaRPr lang="pt-BR"/>
           </a:p>
@@ -665,7 +665,7 @@
           <a:p>
             <a:fld id="{11A84FED-4B30-4DF6-BB30-F99FEDC3385F}" type="datetimeFigureOut">
               <a:rPr lang="pt-BR" smtClean="0"/>
-              <a:t>17/05/2026</a:t>
+              <a:t>18/05/2026</a:t>
             </a:fld>
             <a:endParaRPr lang="pt-BR"/>
           </a:p>
@@ -863,7 +863,7 @@
           <a:p>
             <a:fld id="{11A84FED-4B30-4DF6-BB30-F99FEDC3385F}" type="datetimeFigureOut">
               <a:rPr lang="pt-BR" smtClean="0"/>
-              <a:t>17/05/2026</a:t>
+              <a:t>18/05/2026</a:t>
             </a:fld>
             <a:endParaRPr lang="pt-BR"/>
           </a:p>
@@ -1138,7 +1138,7 @@
           <a:p>
             <a:fld id="{11A84FED-4B30-4DF6-BB30-F99FEDC3385F}" type="datetimeFigureOut">
               <a:rPr lang="pt-BR" smtClean="0"/>
-              <a:t>17/05/2026</a:t>
+              <a:t>18/05/2026</a:t>
             </a:fld>
             <a:endParaRPr lang="pt-BR"/>
           </a:p>
@@ -1403,7 +1403,7 @@
           <a:p>
             <a:fld id="{11A84FED-4B30-4DF6-BB30-F99FEDC3385F}" type="datetimeFigureOut">
               <a:rPr lang="pt-BR" smtClean="0"/>
-              <a:t>17/05/2026</a:t>
+              <a:t>18/05/2026</a:t>
             </a:fld>
             <a:endParaRPr lang="pt-BR"/>
           </a:p>
@@ -1815,7 +1815,7 @@
           <a:p>
             <a:fld id="{11A84FED-4B30-4DF6-BB30-F99FEDC3385F}" type="datetimeFigureOut">
               <a:rPr lang="pt-BR" smtClean="0"/>
-              <a:t>17/05/2026</a:t>
+              <a:t>18/05/2026</a:t>
             </a:fld>
             <a:endParaRPr lang="pt-BR"/>
           </a:p>
@@ -1956,7 +1956,7 @@
           <a:p>
             <a:fld id="{11A84FED-4B30-4DF6-BB30-F99FEDC3385F}" type="datetimeFigureOut">
               <a:rPr lang="pt-BR" smtClean="0"/>
-              <a:t>17/05/2026</a:t>
+              <a:t>18/05/2026</a:t>
             </a:fld>
             <a:endParaRPr lang="pt-BR"/>
           </a:p>
@@ -2069,7 +2069,7 @@
           <a:p>
             <a:fld id="{11A84FED-4B30-4DF6-BB30-F99FEDC3385F}" type="datetimeFigureOut">
               <a:rPr lang="pt-BR" smtClean="0"/>
-              <a:t>17/05/2026</a:t>
+              <a:t>18/05/2026</a:t>
             </a:fld>
             <a:endParaRPr lang="pt-BR"/>
           </a:p>
@@ -2380,7 +2380,7 @@
           <a:p>
             <a:fld id="{11A84FED-4B30-4DF6-BB30-F99FEDC3385F}" type="datetimeFigureOut">
               <a:rPr lang="pt-BR" smtClean="0"/>
-              <a:t>17/05/2026</a:t>
+              <a:t>18/05/2026</a:t>
             </a:fld>
             <a:endParaRPr lang="pt-BR"/>
           </a:p>
@@ -2668,7 +2668,7 @@
           <a:p>
             <a:fld id="{11A84FED-4B30-4DF6-BB30-F99FEDC3385F}" type="datetimeFigureOut">
               <a:rPr lang="pt-BR" smtClean="0"/>
-              <a:t>17/05/2026</a:t>
+              <a:t>18/05/2026</a:t>
             </a:fld>
             <a:endParaRPr lang="pt-BR"/>
           </a:p>
@@ -2909,7 +2909,7 @@
           <a:p>
             <a:fld id="{11A84FED-4B30-4DF6-BB30-F99FEDC3385F}" type="datetimeFigureOut">
               <a:rPr lang="pt-BR" smtClean="0"/>
-              <a:t>17/05/2026</a:t>
+              <a:t>18/05/2026</a:t>
             </a:fld>
             <a:endParaRPr lang="pt-BR"/>
           </a:p>
@@ -3590,6 +3590,79 @@
           </a:prstGeom>
         </p:spPr>
       </p:pic>
+      <p:sp>
+        <p:nvSpPr>
+          <p:cNvPr id="2" name="CaixaDeTexto 1">
+            <a:extLst>
+              <a:ext uri="{FF2B5EF4-FFF2-40B4-BE49-F238E27FC236}">
+                <a16:creationId xmlns:a16="http://schemas.microsoft.com/office/drawing/2014/main" id="{2BCD8F55-9DA5-2648-42C8-6966CCFC0008}"/>
+              </a:ext>
+            </a:extLst>
+          </p:cNvPr>
+          <p:cNvSpPr txBox="1"/>
+          <p:nvPr/>
+        </p:nvSpPr>
+        <p:spPr>
+          <a:xfrm>
+            <a:off x="5524501" y="2726176"/>
+            <a:ext cx="731520" cy="369332"/>
+          </a:xfrm>
+          <a:prstGeom prst="rect">
+            <a:avLst/>
+          </a:prstGeom>
+          <a:noFill/>
+        </p:spPr>
+        <p:txBody>
+          <a:bodyPr wrap="square" rtlCol="0">
+            <a:spAutoFit/>
+          </a:bodyPr>
+          <a:lstStyle/>
+          <a:p>
+            <a:pPr algn="ctr"/>
+            <a:r>
+              <a:rPr lang="pt-BR" dirty="0"/>
+              <a:t>Light</a:t>
+            </a:r>
+          </a:p>
+        </p:txBody>
+      </p:sp>
+      <p:sp>
+        <p:nvSpPr>
+          <p:cNvPr id="3" name="CaixaDeTexto 2">
+            <a:extLst>
+              <a:ext uri="{FF2B5EF4-FFF2-40B4-BE49-F238E27FC236}">
+                <a16:creationId xmlns:a16="http://schemas.microsoft.com/office/drawing/2014/main" id="{8093F382-985E-B567-AFFB-E79DAFE3FDE7}"/>
+              </a:ext>
+            </a:extLst>
+          </p:cNvPr>
+          <p:cNvSpPr txBox="1"/>
+          <p:nvPr/>
+        </p:nvSpPr>
+        <p:spPr>
+          <a:xfrm>
+            <a:off x="6740526" y="2726176"/>
+            <a:ext cx="731520" cy="369332"/>
+          </a:xfrm>
+          <a:prstGeom prst="rect">
+            <a:avLst/>
+          </a:prstGeom>
+          <a:noFill/>
+        </p:spPr>
+        <p:txBody>
+          <a:bodyPr wrap="square" rtlCol="0">
+            <a:spAutoFit/>
+          </a:bodyPr>
+          <a:lstStyle/>
+          <a:p>
+            <a:pPr algn="ctr"/>
+            <a:r>
+              <a:rPr lang="pt-BR" dirty="0" err="1"/>
+              <a:t>Dark</a:t>
+            </a:r>
+            <a:endParaRPr lang="pt-BR" dirty="0"/>
+          </a:p>
+        </p:txBody>
+      </p:sp>
     </p:spTree>
     <p:extLst>
       <p:ext uri="{BB962C8B-B14F-4D97-AF65-F5344CB8AC3E}">

--- a/toniBIM-icons.pptx
+++ b/toniBIM-icons.pptx
@@ -259,7 +259,7 @@
           <a:p>
             <a:fld id="{11A84FED-4B30-4DF6-BB30-F99FEDC3385F}" type="datetimeFigureOut">
               <a:rPr lang="pt-BR" smtClean="0"/>
-              <a:t>18/05/2026</a:t>
+              <a:t>02/06/2026</a:t>
             </a:fld>
             <a:endParaRPr lang="pt-BR"/>
           </a:p>
@@ -457,7 +457,7 @@
           <a:p>
             <a:fld id="{11A84FED-4B30-4DF6-BB30-F99FEDC3385F}" type="datetimeFigureOut">
               <a:rPr lang="pt-BR" smtClean="0"/>
-              <a:t>18/05/2026</a:t>
+              <a:t>02/06/2026</a:t>
             </a:fld>
             <a:endParaRPr lang="pt-BR"/>
           </a:p>
@@ -665,7 +665,7 @@
           <a:p>
             <a:fld id="{11A84FED-4B30-4DF6-BB30-F99FEDC3385F}" type="datetimeFigureOut">
               <a:rPr lang="pt-BR" smtClean="0"/>
-              <a:t>18/05/2026</a:t>
+              <a:t>02/06/2026</a:t>
             </a:fld>
             <a:endParaRPr lang="pt-BR"/>
           </a:p>
@@ -863,7 +863,7 @@
           <a:p>
             <a:fld id="{11A84FED-4B30-4DF6-BB30-F99FEDC3385F}" type="datetimeFigureOut">
               <a:rPr lang="pt-BR" smtClean="0"/>
-              <a:t>18/05/2026</a:t>
+              <a:t>02/06/2026</a:t>
             </a:fld>
             <a:endParaRPr lang="pt-BR"/>
           </a:p>
@@ -1138,7 +1138,7 @@
           <a:p>
             <a:fld id="{11A84FED-4B30-4DF6-BB30-F99FEDC3385F}" type="datetimeFigureOut">
               <a:rPr lang="pt-BR" smtClean="0"/>
-              <a:t>18/05/2026</a:t>
+              <a:t>02/06/2026</a:t>
             </a:fld>
             <a:endParaRPr lang="pt-BR"/>
           </a:p>
@@ -1403,7 +1403,7 @@
           <a:p>
             <a:fld id="{11A84FED-4B30-4DF6-BB30-F99FEDC3385F}" type="datetimeFigureOut">
               <a:rPr lang="pt-BR" smtClean="0"/>
-              <a:t>18/05/2026</a:t>
+              <a:t>02/06/2026</a:t>
             </a:fld>
             <a:endParaRPr lang="pt-BR"/>
           </a:p>
@@ -1815,7 +1815,7 @@
           <a:p>
             <a:fld id="{11A84FED-4B30-4DF6-BB30-F99FEDC3385F}" type="datetimeFigureOut">
               <a:rPr lang="pt-BR" smtClean="0"/>
-              <a:t>18/05/2026</a:t>
+              <a:t>02/06/2026</a:t>
             </a:fld>
             <a:endParaRPr lang="pt-BR"/>
           </a:p>
@@ -1956,7 +1956,7 @@
           <a:p>
             <a:fld id="{11A84FED-4B30-4DF6-BB30-F99FEDC3385F}" type="datetimeFigureOut">
               <a:rPr lang="pt-BR" smtClean="0"/>
-              <a:t>18/05/2026</a:t>
+              <a:t>02/06/2026</a:t>
             </a:fld>
             <a:endParaRPr lang="pt-BR"/>
           </a:p>
@@ -2069,7 +2069,7 @@
           <a:p>
             <a:fld id="{11A84FED-4B30-4DF6-BB30-F99FEDC3385F}" type="datetimeFigureOut">
               <a:rPr lang="pt-BR" smtClean="0"/>
-              <a:t>18/05/2026</a:t>
+              <a:t>02/06/2026</a:t>
             </a:fld>
             <a:endParaRPr lang="pt-BR"/>
           </a:p>
@@ -2380,7 +2380,7 @@
           <a:p>
             <a:fld id="{11A84FED-4B30-4DF6-BB30-F99FEDC3385F}" type="datetimeFigureOut">
               <a:rPr lang="pt-BR" smtClean="0"/>
-              <a:t>18/05/2026</a:t>
+              <a:t>02/06/2026</a:t>
             </a:fld>
             <a:endParaRPr lang="pt-BR"/>
           </a:p>
@@ -2668,7 +2668,7 @@
           <a:p>
             <a:fld id="{11A84FED-4B30-4DF6-BB30-F99FEDC3385F}" type="datetimeFigureOut">
               <a:rPr lang="pt-BR" smtClean="0"/>
-              <a:t>18/05/2026</a:t>
+              <a:t>02/06/2026</a:t>
             </a:fld>
             <a:endParaRPr lang="pt-BR"/>
           </a:p>
@@ -2909,7 +2909,7 @@
           <a:p>
             <a:fld id="{11A84FED-4B30-4DF6-BB30-F99FEDC3385F}" type="datetimeFigureOut">
               <a:rPr lang="pt-BR" smtClean="0"/>
-              <a:t>18/05/2026</a:t>
+              <a:t>02/06/2026</a:t>
             </a:fld>
             <a:endParaRPr lang="pt-BR"/>
           </a:p>
@@ -3663,6 +3663,152 @@
           </a:p>
         </p:txBody>
       </p:sp>
+      <p:pic>
+        <p:nvPicPr>
+          <p:cNvPr id="5" name="Imagem 4">
+            <a:extLst>
+              <a:ext uri="{FF2B5EF4-FFF2-40B4-BE49-F238E27FC236}">
+                <a16:creationId xmlns:a16="http://schemas.microsoft.com/office/drawing/2014/main" id="{35739A24-374C-C079-2D7D-8CE5573278B3}"/>
+              </a:ext>
+            </a:extLst>
+          </p:cNvPr>
+          <p:cNvPicPr>
+            <a:picLocks noChangeAspect="1"/>
+          </p:cNvPicPr>
+          <p:nvPr/>
+        </p:nvPicPr>
+        <p:blipFill>
+          <a:blip r:embed="rId4">
+            <a:extLst>
+              <a:ext uri="{28A0092B-C50C-407E-A947-70E740481C1C}">
+                <a14:useLocalDpi xmlns:a14="http://schemas.microsoft.com/office/drawing/2010/main" val="0"/>
+              </a:ext>
+            </a:extLst>
+          </a:blip>
+          <a:stretch>
+            <a:fillRect/>
+          </a:stretch>
+        </p:blipFill>
+        <p:spPr>
+          <a:xfrm>
+            <a:off x="5695730" y="4132053"/>
+            <a:ext cx="579600" cy="579600"/>
+          </a:xfrm>
+          <a:prstGeom prst="rect">
+            <a:avLst/>
+          </a:prstGeom>
+        </p:spPr>
+      </p:pic>
+      <p:sp>
+        <p:nvSpPr>
+          <p:cNvPr id="6" name="CaixaDeTexto 5">
+            <a:extLst>
+              <a:ext uri="{FF2B5EF4-FFF2-40B4-BE49-F238E27FC236}">
+                <a16:creationId xmlns:a16="http://schemas.microsoft.com/office/drawing/2014/main" id="{360022E4-5356-3617-60AB-1A6399BE486B}"/>
+              </a:ext>
+            </a:extLst>
+          </p:cNvPr>
+          <p:cNvSpPr txBox="1"/>
+          <p:nvPr/>
+        </p:nvSpPr>
+        <p:spPr>
+          <a:xfrm>
+            <a:off x="5576700" y="4791196"/>
+            <a:ext cx="731520" cy="369332"/>
+          </a:xfrm>
+          <a:prstGeom prst="rect">
+            <a:avLst/>
+          </a:prstGeom>
+          <a:noFill/>
+        </p:spPr>
+        <p:txBody>
+          <a:bodyPr wrap="square" rtlCol="0">
+            <a:spAutoFit/>
+          </a:bodyPr>
+          <a:lstStyle/>
+          <a:p>
+            <a:pPr algn="ctr"/>
+            <a:r>
+              <a:rPr lang="pt-BR" dirty="0"/>
+              <a:t>Light</a:t>
+            </a:r>
+          </a:p>
+        </p:txBody>
+      </p:sp>
+      <p:sp>
+        <p:nvSpPr>
+          <p:cNvPr id="7" name="CaixaDeTexto 6">
+            <a:extLst>
+              <a:ext uri="{FF2B5EF4-FFF2-40B4-BE49-F238E27FC236}">
+                <a16:creationId xmlns:a16="http://schemas.microsoft.com/office/drawing/2014/main" id="{4023A721-5DE2-0A19-604A-F35D00F0F5D3}"/>
+              </a:ext>
+            </a:extLst>
+          </p:cNvPr>
+          <p:cNvSpPr txBox="1"/>
+          <p:nvPr/>
+        </p:nvSpPr>
+        <p:spPr>
+          <a:xfrm>
+            <a:off x="6792725" y="4791196"/>
+            <a:ext cx="731520" cy="369332"/>
+          </a:xfrm>
+          <a:prstGeom prst="rect">
+            <a:avLst/>
+          </a:prstGeom>
+          <a:noFill/>
+        </p:spPr>
+        <p:txBody>
+          <a:bodyPr wrap="square" rtlCol="0">
+            <a:spAutoFit/>
+          </a:bodyPr>
+          <a:lstStyle/>
+          <a:p>
+            <a:pPr algn="ctr"/>
+            <a:r>
+              <a:rPr lang="pt-BR" dirty="0" err="1"/>
+              <a:t>Dark</a:t>
+            </a:r>
+            <a:endParaRPr lang="pt-BR" dirty="0"/>
+          </a:p>
+        </p:txBody>
+      </p:sp>
+      <p:pic>
+        <p:nvPicPr>
+          <p:cNvPr id="8" name="Imagem 7">
+            <a:extLst>
+              <a:ext uri="{FF2B5EF4-FFF2-40B4-BE49-F238E27FC236}">
+                <a16:creationId xmlns:a16="http://schemas.microsoft.com/office/drawing/2014/main" id="{A42F13AE-5E60-88F3-E09F-49DEE9320E9D}"/>
+              </a:ext>
+            </a:extLst>
+          </p:cNvPr>
+          <p:cNvPicPr>
+            <a:picLocks noChangeAspect="1"/>
+          </p:cNvPicPr>
+          <p:nvPr/>
+        </p:nvPicPr>
+        <p:blipFill>
+          <a:blip r:embed="rId4">
+            <a:lum bright="70000" contrast="-70000"/>
+            <a:extLst>
+              <a:ext uri="{28A0092B-C50C-407E-A947-70E740481C1C}">
+                <a14:useLocalDpi xmlns:a14="http://schemas.microsoft.com/office/drawing/2010/main" val="0"/>
+              </a:ext>
+            </a:extLst>
+          </a:blip>
+          <a:stretch>
+            <a:fillRect/>
+          </a:stretch>
+        </p:blipFill>
+        <p:spPr>
+          <a:xfrm>
+            <a:off x="6816486" y="4132053"/>
+            <a:ext cx="579600" cy="579600"/>
+          </a:xfrm>
+          <a:prstGeom prst="rect">
+            <a:avLst/>
+          </a:prstGeom>
+        </p:spPr>
+      </p:pic>
     </p:spTree>
     <p:extLst>
       <p:ext uri="{BB962C8B-B14F-4D97-AF65-F5344CB8AC3E}">
